--- a/test.pptx
+++ b/test.pptx
@@ -3031,189 +3031,204 @@
           </a:p>
         </p:txBody>
       </p:sp>
-      <p:sp>
-        <p:nvSpPr>
-          <p:cNvPr id="4" name="文本框 3"/>
-          <p:cNvSpPr txBox="1"/>
+      <p:grpSp>
+        <p:nvGrpSpPr>
+          <p:cNvPr id="7" name="组合 6"/>
+          <p:cNvGrpSpPr/>
           <p:nvPr/>
-        </p:nvSpPr>
-        <p:spPr>
+        </p:nvGrpSpPr>
+        <p:grpSpPr>
           <a:xfrm>
             <a:off x="2019300" y="2763520"/>
-            <a:ext cx="1295400" cy="368300"/>
+            <a:ext cx="7882255" cy="368300"/>
+            <a:chOff x="3180" y="4352"/>
+            <a:chExt cx="12413" cy="580"/>
           </a:xfrm>
-          <a:prstGeom prst="rect">
-            <a:avLst/>
-          </a:prstGeom>
-          <a:noFill/>
-        </p:spPr>
-        <p:txBody>
-          <a:bodyPr wrap="square" rtlCol="0">
-            <a:spAutoFit/>
-          </a:bodyPr>
-          <a:p>
-            <a:r>
-              <a:rPr lang="en-US" altLang="zh-CN">
+        </p:grpSpPr>
+        <p:sp>
+          <p:nvSpPr>
+            <p:cNvPr id="4" name="文本框 3"/>
+            <p:cNvSpPr txBox="1"/>
+            <p:nvPr/>
+          </p:nvSpPr>
+          <p:spPr>
+            <a:xfrm>
+              <a:off x="3180" y="4352"/>
+              <a:ext cx="2040" cy="580"/>
+            </a:xfrm>
+            <a:prstGeom prst="rect">
+              <a:avLst/>
+            </a:prstGeom>
+            <a:noFill/>
+          </p:spPr>
+          <p:txBody>
+            <a:bodyPr wrap="square" rtlCol="0">
+              <a:spAutoFit/>
+            </a:bodyPr>
+            <a:p>
+              <a:r>
+                <a:rPr lang="en-US" altLang="zh-CN">
+                  <a:latin typeface="等线 Light" panose="02010600030101010101" charset="-122"/>
+                  <a:ea typeface="等线 Light" panose="02010600030101010101" charset="-122"/>
+                  <a:cs typeface="等线 Light" panose="02010600030101010101" charset="-122"/>
+                </a:rPr>
+                <a:t>27</a:t>
+              </a:r>
+              <a:r>
+                <a:rPr lang="zh-CN" altLang="en-US">
+                  <a:latin typeface="等线 Light" panose="02010600030101010101" charset="-122"/>
+                  <a:ea typeface="等线 Light" panose="02010600030101010101" charset="-122"/>
+                  <a:cs typeface="等线 Light" panose="02010600030101010101" charset="-122"/>
+                </a:rPr>
+                <a:t>年</a:t>
+              </a:r>
+              <a:r>
+                <a:rPr lang="en-US" altLang="zh-CN">
+                  <a:latin typeface="等线 Light" panose="02010600030101010101" charset="-122"/>
+                  <a:ea typeface="等线 Light" panose="02010600030101010101" charset="-122"/>
+                  <a:cs typeface="等线 Light" panose="02010600030101010101" charset="-122"/>
+                </a:rPr>
+                <a:t>5</a:t>
+              </a:r>
+              <a:r>
+                <a:rPr lang="zh-CN" altLang="en-US">
+                  <a:latin typeface="等线 Light" panose="02010600030101010101" charset="-122"/>
+                  <a:ea typeface="等线 Light" panose="02010600030101010101" charset="-122"/>
+                  <a:cs typeface="等线 Light" panose="02010600030101010101" charset="-122"/>
+                </a:rPr>
+                <a:t>以</a:t>
+              </a:r>
+              <a:endParaRPr lang="zh-CN" altLang="en-US">
                 <a:latin typeface="等线 Light" panose="02010600030101010101" charset="-122"/>
                 <a:ea typeface="等线 Light" panose="02010600030101010101" charset="-122"/>
                 <a:cs typeface="等线 Light" panose="02010600030101010101" charset="-122"/>
-              </a:rPr>
-              <a:t>27</a:t>
-            </a:r>
-            <a:r>
-              <a:rPr lang="zh-CN" altLang="en-US">
+              </a:endParaRPr>
+            </a:p>
+          </p:txBody>
+        </p:sp>
+        <p:sp>
+          <p:nvSpPr>
+            <p:cNvPr id="5" name="文本框 4"/>
+            <p:cNvSpPr txBox="1"/>
+            <p:nvPr/>
+          </p:nvSpPr>
+          <p:spPr>
+            <a:xfrm>
+              <a:off x="8675" y="4352"/>
+              <a:ext cx="2040" cy="580"/>
+            </a:xfrm>
+            <a:prstGeom prst="rect">
+              <a:avLst/>
+            </a:prstGeom>
+            <a:noFill/>
+          </p:spPr>
+          <p:txBody>
+            <a:bodyPr wrap="square" rtlCol="0">
+              <a:spAutoFit/>
+            </a:bodyPr>
+            <a:p>
+              <a:r>
+                <a:rPr lang="en-US" altLang="zh-CN">
+                  <a:latin typeface="等线 Light" panose="02010600030101010101" charset="-122"/>
+                  <a:ea typeface="等线 Light" panose="02010600030101010101" charset="-122"/>
+                  <a:cs typeface="等线 Light" panose="02010600030101010101" charset="-122"/>
+                </a:rPr>
+                <a:t>27</a:t>
+              </a:r>
+              <a:r>
+                <a:rPr lang="zh-CN" altLang="en-US">
+                  <a:latin typeface="等线 Light" panose="02010600030101010101" charset="-122"/>
+                  <a:ea typeface="等线 Light" panose="02010600030101010101" charset="-122"/>
+                  <a:cs typeface="等线 Light" panose="02010600030101010101" charset="-122"/>
+                </a:rPr>
+                <a:t>年</a:t>
+              </a:r>
+              <a:r>
+                <a:rPr lang="en-US" altLang="zh-CN">
+                  <a:latin typeface="等线 Light" panose="02010600030101010101" charset="-122"/>
+                  <a:ea typeface="等线 Light" panose="02010600030101010101" charset="-122"/>
+                  <a:cs typeface="等线 Light" panose="02010600030101010101" charset="-122"/>
+                </a:rPr>
+                <a:t>15</a:t>
+              </a:r>
+              <a:r>
+                <a:rPr lang="zh-CN" altLang="en-US">
+                  <a:latin typeface="等线 Light" panose="02010600030101010101" charset="-122"/>
+                  <a:ea typeface="等线 Light" panose="02010600030101010101" charset="-122"/>
+                  <a:cs typeface="等线 Light" panose="02010600030101010101" charset="-122"/>
+                </a:rPr>
+                <a:t>以</a:t>
+              </a:r>
+              <a:endParaRPr lang="zh-CN" altLang="en-US">
                 <a:latin typeface="等线 Light" panose="02010600030101010101" charset="-122"/>
                 <a:ea typeface="等线 Light" panose="02010600030101010101" charset="-122"/>
                 <a:cs typeface="等线 Light" panose="02010600030101010101" charset="-122"/>
-              </a:rPr>
-              <a:t>年</a:t>
-            </a:r>
-            <a:r>
-              <a:rPr lang="en-US" altLang="zh-CN">
+              </a:endParaRPr>
+            </a:p>
+          </p:txBody>
+        </p:sp>
+        <p:sp>
+          <p:nvSpPr>
+            <p:cNvPr id="6" name="文本框 5"/>
+            <p:cNvSpPr txBox="1"/>
+            <p:nvPr/>
+          </p:nvSpPr>
+          <p:spPr>
+            <a:xfrm>
+              <a:off x="13553" y="4352"/>
+              <a:ext cx="2040" cy="580"/>
+            </a:xfrm>
+            <a:prstGeom prst="rect">
+              <a:avLst/>
+            </a:prstGeom>
+            <a:noFill/>
+          </p:spPr>
+          <p:txBody>
+            <a:bodyPr wrap="square" rtlCol="0">
+              <a:spAutoFit/>
+            </a:bodyPr>
+            <a:p>
+              <a:r>
+                <a:rPr lang="en-US" altLang="zh-CN">
+                  <a:latin typeface="等线 Light" panose="02010600030101010101" charset="-122"/>
+                  <a:ea typeface="等线 Light" panose="02010600030101010101" charset="-122"/>
+                  <a:cs typeface="等线 Light" panose="02010600030101010101" charset="-122"/>
+                </a:rPr>
+                <a:t>27</a:t>
+              </a:r>
+              <a:r>
+                <a:rPr lang="zh-CN" altLang="en-US">
+                  <a:latin typeface="等线 Light" panose="02010600030101010101" charset="-122"/>
+                  <a:ea typeface="等线 Light" panose="02010600030101010101" charset="-122"/>
+                  <a:cs typeface="等线 Light" panose="02010600030101010101" charset="-122"/>
+                </a:rPr>
+                <a:t>年</a:t>
+              </a:r>
+              <a:r>
+                <a:rPr lang="en-US" altLang="zh-CN">
+                  <a:latin typeface="等线 Light" panose="02010600030101010101" charset="-122"/>
+                  <a:ea typeface="等线 Light" panose="02010600030101010101" charset="-122"/>
+                  <a:cs typeface="等线 Light" panose="02010600030101010101" charset="-122"/>
+                </a:rPr>
+                <a:t>115</a:t>
+              </a:r>
+              <a:r>
+                <a:rPr lang="zh-CN" altLang="en-US">
+                  <a:latin typeface="等线 Light" panose="02010600030101010101" charset="-122"/>
+                  <a:ea typeface="等线 Light" panose="02010600030101010101" charset="-122"/>
+                  <a:cs typeface="等线 Light" panose="02010600030101010101" charset="-122"/>
+                </a:rPr>
+                <a:t>以</a:t>
+              </a:r>
+              <a:endParaRPr lang="zh-CN" altLang="en-US">
                 <a:latin typeface="等线 Light" panose="02010600030101010101" charset="-122"/>
                 <a:ea typeface="等线 Light" panose="02010600030101010101" charset="-122"/>
                 <a:cs typeface="等线 Light" panose="02010600030101010101" charset="-122"/>
-              </a:rPr>
-              <a:t>5</a:t>
-            </a:r>
-            <a:r>
-              <a:rPr lang="zh-CN" altLang="en-US">
-                <a:latin typeface="等线 Light" panose="02010600030101010101" charset="-122"/>
-                <a:ea typeface="等线 Light" panose="02010600030101010101" charset="-122"/>
-                <a:cs typeface="等线 Light" panose="02010600030101010101" charset="-122"/>
-              </a:rPr>
-              <a:t>以</a:t>
-            </a:r>
-            <a:endParaRPr lang="zh-CN" altLang="en-US">
-              <a:latin typeface="等线 Light" panose="02010600030101010101" charset="-122"/>
-              <a:ea typeface="等线 Light" panose="02010600030101010101" charset="-122"/>
-              <a:cs typeface="等线 Light" panose="02010600030101010101" charset="-122"/>
-            </a:endParaRPr>
-          </a:p>
-        </p:txBody>
-      </p:sp>
-      <p:sp>
-        <p:nvSpPr>
-          <p:cNvPr id="5" name="文本框 4"/>
-          <p:cNvSpPr txBox="1"/>
-          <p:nvPr/>
-        </p:nvSpPr>
-        <p:spPr>
-          <a:xfrm>
-            <a:off x="5508625" y="2763520"/>
-            <a:ext cx="1295400" cy="368300"/>
-          </a:xfrm>
-          <a:prstGeom prst="rect">
-            <a:avLst/>
-          </a:prstGeom>
-          <a:noFill/>
-        </p:spPr>
-        <p:txBody>
-          <a:bodyPr wrap="square" rtlCol="0">
-            <a:spAutoFit/>
-          </a:bodyPr>
-          <a:p>
-            <a:r>
-              <a:rPr lang="en-US" altLang="zh-CN">
-                <a:latin typeface="等线 Light" panose="02010600030101010101" charset="-122"/>
-                <a:ea typeface="等线 Light" panose="02010600030101010101" charset="-122"/>
-                <a:cs typeface="等线 Light" panose="02010600030101010101" charset="-122"/>
-              </a:rPr>
-              <a:t>27</a:t>
-            </a:r>
-            <a:r>
-              <a:rPr lang="zh-CN" altLang="en-US">
-                <a:latin typeface="等线 Light" panose="02010600030101010101" charset="-122"/>
-                <a:ea typeface="等线 Light" panose="02010600030101010101" charset="-122"/>
-                <a:cs typeface="等线 Light" panose="02010600030101010101" charset="-122"/>
-              </a:rPr>
-              <a:t>年</a:t>
-            </a:r>
-            <a:r>
-              <a:rPr lang="en-US" altLang="zh-CN">
-                <a:latin typeface="等线 Light" panose="02010600030101010101" charset="-122"/>
-                <a:ea typeface="等线 Light" panose="02010600030101010101" charset="-122"/>
-                <a:cs typeface="等线 Light" panose="02010600030101010101" charset="-122"/>
-              </a:rPr>
-              <a:t>15</a:t>
-            </a:r>
-            <a:r>
-              <a:rPr lang="zh-CN" altLang="en-US">
-                <a:latin typeface="等线 Light" panose="02010600030101010101" charset="-122"/>
-                <a:ea typeface="等线 Light" panose="02010600030101010101" charset="-122"/>
-                <a:cs typeface="等线 Light" panose="02010600030101010101" charset="-122"/>
-              </a:rPr>
-              <a:t>以</a:t>
-            </a:r>
-            <a:endParaRPr lang="zh-CN" altLang="en-US">
-              <a:latin typeface="等线 Light" panose="02010600030101010101" charset="-122"/>
-              <a:ea typeface="等线 Light" panose="02010600030101010101" charset="-122"/>
-              <a:cs typeface="等线 Light" panose="02010600030101010101" charset="-122"/>
-            </a:endParaRPr>
-          </a:p>
-        </p:txBody>
-      </p:sp>
-      <p:sp>
-        <p:nvSpPr>
-          <p:cNvPr id="6" name="文本框 5"/>
-          <p:cNvSpPr txBox="1"/>
-          <p:nvPr/>
-        </p:nvSpPr>
-        <p:spPr>
-          <a:xfrm>
-            <a:off x="8606155" y="2763520"/>
-            <a:ext cx="1295400" cy="368300"/>
-          </a:xfrm>
-          <a:prstGeom prst="rect">
-            <a:avLst/>
-          </a:prstGeom>
-          <a:noFill/>
-        </p:spPr>
-        <p:txBody>
-          <a:bodyPr wrap="square" rtlCol="0">
-            <a:spAutoFit/>
-          </a:bodyPr>
-          <a:p>
-            <a:r>
-              <a:rPr lang="en-US" altLang="zh-CN">
-                <a:latin typeface="等线 Light" panose="02010600030101010101" charset="-122"/>
-                <a:ea typeface="等线 Light" panose="02010600030101010101" charset="-122"/>
-                <a:cs typeface="等线 Light" panose="02010600030101010101" charset="-122"/>
-              </a:rPr>
-              <a:t>27</a:t>
-            </a:r>
-            <a:r>
-              <a:rPr lang="zh-CN" altLang="en-US">
-                <a:latin typeface="等线 Light" panose="02010600030101010101" charset="-122"/>
-                <a:ea typeface="等线 Light" panose="02010600030101010101" charset="-122"/>
-                <a:cs typeface="等线 Light" panose="02010600030101010101" charset="-122"/>
-              </a:rPr>
-              <a:t>年</a:t>
-            </a:r>
-            <a:r>
-              <a:rPr lang="en-US" altLang="zh-CN">
-                <a:latin typeface="等线 Light" panose="02010600030101010101" charset="-122"/>
-                <a:ea typeface="等线 Light" panose="02010600030101010101" charset="-122"/>
-                <a:cs typeface="等线 Light" panose="02010600030101010101" charset="-122"/>
-              </a:rPr>
-              <a:t>115</a:t>
-            </a:r>
-            <a:r>
-              <a:rPr lang="zh-CN" altLang="en-US">
-                <a:latin typeface="等线 Light" panose="02010600030101010101" charset="-122"/>
-                <a:ea typeface="等线 Light" panose="02010600030101010101" charset="-122"/>
-                <a:cs typeface="等线 Light" panose="02010600030101010101" charset="-122"/>
-              </a:rPr>
-              <a:t>以</a:t>
-            </a:r>
-            <a:endParaRPr lang="zh-CN" altLang="en-US">
-              <a:latin typeface="等线 Light" panose="02010600030101010101" charset="-122"/>
-              <a:ea typeface="等线 Light" panose="02010600030101010101" charset="-122"/>
-              <a:cs typeface="等线 Light" panose="02010600030101010101" charset="-122"/>
-            </a:endParaRPr>
-          </a:p>
-        </p:txBody>
-      </p:sp>
+              </a:endParaRPr>
+            </a:p>
+          </p:txBody>
+        </p:sp>
+      </p:grpSp>
     </p:spTree>
   </p:cSld>
   <p:clrMapOvr>
